--- a/05-AI应用基础48课时版/V2授课PPT/W14-第12次课-CNN或LSTM二选一（.pptx
+++ b/05-AI应用基础48课时版/V2授课PPT/W14-第12次课-CNN或LSTM二选一（.pptx
@@ -4170,7 +4170,7 @@
                 </a:solidFill>
                 <a:latin typeface="微软雅黑"/>
               </a:rPr>
-              <a:t>第19周 · 第12次课（2课时 · 80分钟）</a:t>
+              <a:t>第14周 · 第12次课（2课时 · 80分钟）</a:t>
             </a:r>
           </a:p>
           <a:p>

--- a/05-AI应用基础48课时版/V2授课PPT/W14-第12次课-CNN或LSTM二选一（.pptx
+++ b/05-AI应用基础48课时版/V2授课PPT/W14-第12次课-CNN或LSTM二选一（.pptx
@@ -12,6 +12,8 @@
     <p:sldId id="318" r:id="rId70"/>
     <p:sldId id="366" r:id="rId16"/>
     <p:sldId id="367" r:id="rId17"/>
+    <p:sldId id="368" r:id="rId18"/>
+    <p:sldId id="369" r:id="rId19"/>
     <p:sldId id="365" r:id="rId15"/>
     <p:sldId id="363" r:id="rId115"/>
     <p:sldId id="364" r:id="rId116"/>
@@ -4670,6 +4672,2131 @@
 </p:sld>
 </file>
 
+<file path=ppt/slides/slide11.xml><?xml version="1.0" encoding="utf-8"?>
+<p:sld xmlns:a="http://schemas.openxmlformats.org/drawingml/2006/main" xmlns:p="http://schemas.openxmlformats.org/presentationml/2006/main" xmlns:r="http://schemas.openxmlformats.org/officeDocument/2006/relationships">
+  <p:cSld>
+    <p:spTree>
+      <p:nvGrpSpPr>
+        <p:cNvPr id="1" name=""/>
+        <p:cNvGrpSpPr/>
+        <p:nvPr/>
+      </p:nvGrpSpPr>
+      <p:grpSpPr/>
+      <p:sp>
+        <p:nvSpPr>
+          <p:cNvPr id="2" name="Rectangle 1"/>
+          <p:cNvSpPr/>
+          <p:nvPr/>
+        </p:nvSpPr>
+        <p:spPr>
+          <a:xfrm>
+            <a:off x="0" y="0"/>
+            <a:ext cx="12192000" cy="1150000"/>
+          </a:xfrm>
+          <a:prstGeom prst="rect">
+            <a:avLst/>
+          </a:prstGeom>
+          <a:solidFill>
+            <a:srgbClr val="010328"/>
+          </a:solidFill>
+          <a:ln>
+            <a:noFill/>
+          </a:ln>
+          <a:effectLst/>
+        </p:spPr>
+        <p:style>
+          <a:lnRef idx="1">
+            <a:schemeClr val="accent1"/>
+          </a:lnRef>
+          <a:fillRef idx="3">
+            <a:schemeClr val="accent1"/>
+          </a:fillRef>
+          <a:effectRef idx="2">
+            <a:schemeClr val="accent1"/>
+          </a:effectRef>
+          <a:fontRef idx="minor">
+            <a:schemeClr val="lt1"/>
+          </a:fontRef>
+        </p:style>
+        <p:txBody>
+          <a:bodyPr rtlCol="0" anchor="ctr"/>
+          <a:lstStyle/>
+          <a:p>
+            <a:pPr algn="ctr"/>
+          </a:p>
+        </p:txBody>
+      </p:sp>
+      <p:sp>
+        <p:nvSpPr>
+          <p:cNvPr id="3" name="Rectangle 2"/>
+          <p:cNvSpPr/>
+          <p:nvPr/>
+        </p:nvSpPr>
+        <p:spPr>
+          <a:xfrm>
+            <a:off x="0" y="1150000"/>
+            <a:ext cx="2600000" cy="70000"/>
+          </a:xfrm>
+          <a:prstGeom prst="rect">
+            <a:avLst/>
+          </a:prstGeom>
+          <a:solidFill>
+            <a:srgbClr val="F5670F"/>
+          </a:solidFill>
+          <a:ln>
+            <a:noFill/>
+          </a:ln>
+          <a:effectLst/>
+        </p:spPr>
+        <p:style>
+          <a:lnRef idx="1">
+            <a:schemeClr val="accent1"/>
+          </a:lnRef>
+          <a:fillRef idx="3">
+            <a:schemeClr val="accent1"/>
+          </a:fillRef>
+          <a:effectRef idx="2">
+            <a:schemeClr val="accent1"/>
+          </a:effectRef>
+          <a:fontRef idx="minor">
+            <a:schemeClr val="lt1"/>
+          </a:fontRef>
+        </p:style>
+        <p:txBody>
+          <a:bodyPr rtlCol="0" anchor="ctr"/>
+          <a:lstStyle/>
+          <a:p>
+            <a:pPr algn="ctr"/>
+          </a:p>
+        </p:txBody>
+      </p:sp>
+      <p:sp>
+        <p:nvSpPr>
+          <p:cNvPr id="4" name="TextBox 3"/>
+          <p:cNvSpPr txBox="1"/>
+          <p:nvPr/>
+        </p:nvSpPr>
+        <p:spPr>
+          <a:xfrm>
+            <a:off x="700000" y="300000"/>
+            <a:ext cx="10792000" cy="700000"/>
+          </a:xfrm>
+          <a:prstGeom prst="rect">
+            <a:avLst/>
+          </a:prstGeom>
+          <a:noFill/>
+        </p:spPr>
+        <p:txBody>
+          <a:bodyPr wrap="square" anchor="t">
+            <a:spAutoFit/>
+          </a:bodyPr>
+          <a:lstStyle/>
+          <a:p>
+            <a:pPr algn="l">
+              <a:lnSpc>
+                <a:spcPct val="110000"/>
+              </a:lnSpc>
+              <a:spcAft>
+                <a:spcPts val="600"/>
+              </a:spcAft>
+            </a:pPr>
+            <a:r>
+              <a:rPr sz="2400" b="1">
+                <a:solidFill>
+                  <a:srgbClr val="FFFFFF"/>
+                </a:solidFill>
+                <a:latin typeface="微软雅黑"/>
+              </a:rPr>
+              <a:t>实测验收 · m23b_bidding</a:t>
+            </a:r>
+          </a:p>
+        </p:txBody>
+      </p:sp>
+      <p:sp>
+        <p:nvSpPr>
+          <p:cNvPr id="11" name="Rectangle 10"/>
+          <p:cNvSpPr/>
+          <p:nvPr/>
+        </p:nvSpPr>
+        <p:spPr>
+          <a:xfrm>
+            <a:off x="500000" y="6500000"/>
+            <a:ext cx="11100000" cy="20000"/>
+          </a:xfrm>
+          <a:prstGeom prst="rect">
+            <a:avLst/>
+          </a:prstGeom>
+          <a:solidFill>
+            <a:srgbClr val="C9D4EE"/>
+          </a:solidFill>
+          <a:ln>
+            <a:noFill/>
+          </a:ln>
+          <a:effectLst/>
+        </p:spPr>
+        <p:style>
+          <a:lnRef idx="1">
+            <a:schemeClr val="accent1"/>
+          </a:lnRef>
+          <a:fillRef idx="3">
+            <a:schemeClr val="accent1"/>
+          </a:fillRef>
+          <a:effectRef idx="2">
+            <a:schemeClr val="accent1"/>
+          </a:effectRef>
+          <a:fontRef idx="minor">
+            <a:schemeClr val="lt1"/>
+          </a:fontRef>
+        </p:style>
+        <p:txBody>
+          <a:bodyPr rtlCol="0" anchor="ctr"/>
+          <a:lstStyle/>
+          <a:p>
+            <a:pPr algn="ctr"/>
+          </a:p>
+        </p:txBody>
+      </p:sp>
+      <p:sp>
+        <p:nvSpPr>
+          <p:cNvPr id="12" name="TextBox 11"/>
+          <p:cNvSpPr txBox="1"/>
+          <p:nvPr/>
+        </p:nvSpPr>
+        <p:spPr>
+          <a:xfrm>
+            <a:off x="500000" y="6540000"/>
+            <a:ext cx="7000000" cy="300000"/>
+          </a:xfrm>
+          <a:prstGeom prst="rect">
+            <a:avLst/>
+          </a:prstGeom>
+          <a:noFill/>
+        </p:spPr>
+        <p:txBody>
+          <a:bodyPr wrap="square" anchor="t">
+            <a:spAutoFit/>
+          </a:bodyPr>
+          <a:lstStyle/>
+          <a:p>
+            <a:pPr algn="l">
+              <a:lnSpc>
+                <a:spcPct val="110000"/>
+              </a:lnSpc>
+              <a:spcAft>
+                <a:spcPts val="600"/>
+              </a:spcAft>
+            </a:pPr>
+            <a:r>
+              <a:rPr sz="1000" b="0">
+                <a:solidFill>
+                  <a:srgbClr val="8A97B5"/>
+                </a:solidFill>
+                <a:latin typeface="微软雅黑"/>
+              </a:rPr>
+              <a:t>两江智造集团 · AI应用基础48课时版</a:t>
+            </a:r>
+          </a:p>
+        </p:txBody>
+      </p:sp>
+      <p:sp>
+        <p:nvSpPr>
+          <p:cNvPr id="13" name="TextBox 12"/>
+          <p:cNvSpPr txBox="1"/>
+          <p:nvPr/>
+        </p:nvSpPr>
+        <p:spPr>
+          <a:xfrm>
+            <a:off x="10600000" y="6540000"/>
+            <a:ext cx="1000000" cy="300000"/>
+          </a:xfrm>
+          <a:prstGeom prst="rect">
+            <a:avLst/>
+          </a:prstGeom>
+          <a:noFill/>
+        </p:spPr>
+        <p:txBody>
+          <a:bodyPr wrap="square" anchor="t">
+            <a:spAutoFit/>
+          </a:bodyPr>
+          <a:lstStyle/>
+          <a:p>
+            <a:pPr algn="r">
+              <a:lnSpc>
+                <a:spcPct val="110000"/>
+              </a:lnSpc>
+              <a:spcAft>
+                <a:spcPts val="600"/>
+              </a:spcAft>
+            </a:pPr>
+            <a:r>
+              <a:rPr sz="1000" b="0">
+                <a:solidFill>
+                  <a:srgbClr val="8A97B5"/>
+                </a:solidFill>
+                <a:latin typeface="微软雅黑"/>
+              </a:rPr>
+              <a:t>8 / 12</a:t>
+            </a:r>
+          </a:p>
+        </p:txBody>
+      </p:sp>
+      <p:sp>
+        <p:nvSpPr>
+          <p:cNvPr id="14" name="Rectangle 13"/>
+          <p:cNvSpPr/>
+          <p:nvPr/>
+        </p:nvSpPr>
+        <p:spPr>
+          <a:xfrm>
+            <a:off x="0" y="1371600"/>
+            <a:ext cx="12188952" cy="713232"/>
+          </a:xfrm>
+          <a:prstGeom prst="rect">
+            <a:avLst/>
+          </a:prstGeom>
+          <a:solidFill>
+            <a:srgbClr val="F2F5F9"/>
+          </a:solidFill>
+          <a:ln>
+            <a:noFill/>
+          </a:ln>
+          <a:effectLst/>
+        </p:spPr>
+        <p:style>
+          <a:lnRef idx="1">
+            <a:schemeClr val="accent1"/>
+          </a:lnRef>
+          <a:fillRef idx="3">
+            <a:schemeClr val="accent1"/>
+          </a:fillRef>
+          <a:effectRef idx="2">
+            <a:schemeClr val="accent1"/>
+          </a:effectRef>
+          <a:fontRef idx="minor">
+            <a:schemeClr val="lt1"/>
+          </a:fontRef>
+        </p:style>
+        <p:txBody>
+          <a:bodyPr rtlCol="0" anchor="ctr" wrap="square"/>
+          <a:lstStyle/>
+          <a:p>
+            <a:pPr algn="ctr"/>
+          </a:p>
+        </p:txBody>
+      </p:sp>
+      <p:sp>
+        <p:nvSpPr>
+          <p:cNvPr id="15" name="TextBox 14"/>
+          <p:cNvSpPr txBox="1"/>
+          <p:nvPr/>
+        </p:nvSpPr>
+        <p:spPr>
+          <a:xfrm>
+            <a:off x="457200" y="1426464"/>
+            <a:ext cx="2651760" cy="566928"/>
+          </a:xfrm>
+          <a:prstGeom prst="rect">
+            <a:avLst/>
+          </a:prstGeom>
+          <a:noFill/>
+        </p:spPr>
+        <p:txBody>
+          <a:bodyPr wrap="square">
+            <a:spAutoFit/>
+          </a:bodyPr>
+          <a:lstStyle/>
+          <a:p>
+            <a:r>
+              <a:rPr sz="1400" b="1">
+                <a:solidFill>
+                  <a:srgbClr val="2E7D46"/>
+                </a:solidFill>
+                <a:latin typeface="微软雅黑"/>
+              </a:rPr>
+              <a:t>实测达成档位</a:t>
+            </a:r>
+          </a:p>
+          <a:p>
+            <a:r>
+              <a:rPr sz="1400" b="1">
+                <a:solidFill>
+                  <a:srgbClr val="2E7D46"/>
+                </a:solidFill>
+                <a:latin typeface="微软雅黑"/>
+              </a:rPr>
+              <a:t>优(A)</a:t>
+            </a:r>
+          </a:p>
+        </p:txBody>
+      </p:sp>
+      <p:sp>
+        <p:nvSpPr>
+          <p:cNvPr id="16" name="Rectangle 15"/>
+          <p:cNvSpPr/>
+          <p:nvPr/>
+        </p:nvSpPr>
+        <p:spPr>
+          <a:xfrm>
+            <a:off x="3200400" y="1426464"/>
+            <a:ext cx="1627632" cy="603504"/>
+          </a:xfrm>
+          <a:prstGeom prst="rect">
+            <a:avLst/>
+          </a:prstGeom>
+          <a:solidFill>
+            <a:srgbClr val="FFFFFF"/>
+          </a:solidFill>
+          <a:ln>
+            <a:solidFill>
+              <a:srgbClr val="D6DCE4"/>
+            </a:solidFill>
+          </a:ln>
+          <a:effectLst/>
+        </p:spPr>
+        <p:style>
+          <a:lnRef idx="1">
+            <a:schemeClr val="accent1"/>
+          </a:lnRef>
+          <a:fillRef idx="3">
+            <a:schemeClr val="accent1"/>
+          </a:fillRef>
+          <a:effectRef idx="2">
+            <a:schemeClr val="accent1"/>
+          </a:effectRef>
+          <a:fontRef idx="minor">
+            <a:schemeClr val="lt1"/>
+          </a:fontRef>
+        </p:style>
+        <p:txBody>
+          <a:bodyPr rtlCol="0" anchor="ctr" wrap="square"/>
+          <a:lstStyle/>
+          <a:p>
+            <a:pPr algn="ctr"/>
+          </a:p>
+        </p:txBody>
+      </p:sp>
+      <p:sp>
+        <p:nvSpPr>
+          <p:cNvPr id="17" name="TextBox 16"/>
+          <p:cNvSpPr txBox="1"/>
+          <p:nvPr/>
+        </p:nvSpPr>
+        <p:spPr>
+          <a:xfrm>
+            <a:off x="3246120" y="1463040"/>
+            <a:ext cx="1536192" cy="548640"/>
+          </a:xfrm>
+          <a:prstGeom prst="rect">
+            <a:avLst/>
+          </a:prstGeom>
+          <a:noFill/>
+        </p:spPr>
+        <p:txBody>
+          <a:bodyPr wrap="square">
+            <a:spAutoFit/>
+          </a:bodyPr>
+          <a:lstStyle/>
+          <a:p>
+            <a:r>
+              <a:rPr sz="900" b="0">
+                <a:solidFill>
+                  <a:srgbClr val="35506E"/>
+                </a:solidFill>
+                <a:latin typeface="微软雅黑"/>
+              </a:rPr>
+              <a:t>代码规范率 95.11%（工单把≥70%钉在 D 档）</a:t>
+            </a:r>
+          </a:p>
+        </p:txBody>
+      </p:sp>
+      <p:sp>
+        <p:nvSpPr>
+          <p:cNvPr id="18" name="Rectangle 17"/>
+          <p:cNvSpPr/>
+          <p:nvPr/>
+        </p:nvSpPr>
+        <p:spPr>
+          <a:xfrm>
+            <a:off x="4901184" y="1426464"/>
+            <a:ext cx="1627632" cy="603504"/>
+          </a:xfrm>
+          <a:prstGeom prst="rect">
+            <a:avLst/>
+          </a:prstGeom>
+          <a:solidFill>
+            <a:srgbClr val="FFFFFF"/>
+          </a:solidFill>
+          <a:ln>
+            <a:solidFill>
+              <a:srgbClr val="D6DCE4"/>
+            </a:solidFill>
+          </a:ln>
+          <a:effectLst/>
+        </p:spPr>
+        <p:style>
+          <a:lnRef idx="1">
+            <a:schemeClr val="accent1"/>
+          </a:lnRef>
+          <a:fillRef idx="3">
+            <a:schemeClr val="accent1"/>
+          </a:fillRef>
+          <a:effectRef idx="2">
+            <a:schemeClr val="accent1"/>
+          </a:effectRef>
+          <a:fontRef idx="minor">
+            <a:schemeClr val="lt1"/>
+          </a:fontRef>
+        </p:style>
+        <p:txBody>
+          <a:bodyPr rtlCol="0" anchor="ctr" wrap="square"/>
+          <a:lstStyle/>
+          <a:p>
+            <a:pPr algn="ctr"/>
+          </a:p>
+        </p:txBody>
+      </p:sp>
+      <p:sp>
+        <p:nvSpPr>
+          <p:cNvPr id="19" name="TextBox 18"/>
+          <p:cNvSpPr txBox="1"/>
+          <p:nvPr/>
+        </p:nvSpPr>
+        <p:spPr>
+          <a:xfrm>
+            <a:off x="4946904" y="1463040"/>
+            <a:ext cx="1536192" cy="548640"/>
+          </a:xfrm>
+          <a:prstGeom prst="rect">
+            <a:avLst/>
+          </a:prstGeom>
+          <a:noFill/>
+        </p:spPr>
+        <p:txBody>
+          <a:bodyPr wrap="square">
+            <a:spAutoFit/>
+          </a:bodyPr>
+          <a:lstStyle/>
+          <a:p>
+            <a:r>
+              <a:rPr sz="900" b="0">
+                <a:solidFill>
+                  <a:srgbClr val="35506E"/>
+                </a:solidFill>
+                <a:latin typeface="微软雅黑"/>
+              </a:rPr>
+              <a:t>复现比对 一致</a:t>
+            </a:r>
+          </a:p>
+        </p:txBody>
+      </p:sp>
+      <p:sp>
+        <p:nvSpPr>
+          <p:cNvPr id="20" name="Rectangle 19"/>
+          <p:cNvSpPr/>
+          <p:nvPr/>
+        </p:nvSpPr>
+        <p:spPr>
+          <a:xfrm>
+            <a:off x="6601968" y="1426464"/>
+            <a:ext cx="1627632" cy="603504"/>
+          </a:xfrm>
+          <a:prstGeom prst="rect">
+            <a:avLst/>
+          </a:prstGeom>
+          <a:solidFill>
+            <a:srgbClr val="FFFFFF"/>
+          </a:solidFill>
+          <a:ln>
+            <a:solidFill>
+              <a:srgbClr val="D6DCE4"/>
+            </a:solidFill>
+          </a:ln>
+          <a:effectLst/>
+        </p:spPr>
+        <p:style>
+          <a:lnRef idx="1">
+            <a:schemeClr val="accent1"/>
+          </a:lnRef>
+          <a:fillRef idx="3">
+            <a:schemeClr val="accent1"/>
+          </a:fillRef>
+          <a:effectRef idx="2">
+            <a:schemeClr val="accent1"/>
+          </a:effectRef>
+          <a:fontRef idx="minor">
+            <a:schemeClr val="lt1"/>
+          </a:fontRef>
+        </p:style>
+        <p:txBody>
+          <a:bodyPr rtlCol="0" anchor="ctr" wrap="square"/>
+          <a:lstStyle/>
+          <a:p>
+            <a:pPr algn="ctr"/>
+          </a:p>
+        </p:txBody>
+      </p:sp>
+      <p:sp>
+        <p:nvSpPr>
+          <p:cNvPr id="21" name="TextBox 20"/>
+          <p:cNvSpPr txBox="1"/>
+          <p:nvPr/>
+        </p:nvSpPr>
+        <p:spPr>
+          <a:xfrm>
+            <a:off x="6647688" y="1463040"/>
+            <a:ext cx="1536192" cy="548640"/>
+          </a:xfrm>
+          <a:prstGeom prst="rect">
+            <a:avLst/>
+          </a:prstGeom>
+          <a:noFill/>
+        </p:spPr>
+        <p:txBody>
+          <a:bodyPr wrap="square">
+            <a:spAutoFit/>
+          </a:bodyPr>
+          <a:lstStyle/>
+          <a:p>
+            <a:r>
+              <a:rPr sz="900" b="0">
+                <a:solidFill>
+                  <a:srgbClr val="35506E"/>
+                </a:solidFill>
+                <a:latin typeface="微软雅黑"/>
+              </a:rPr>
+              <a:t>CNN(torch) acc 1.0000</a:t>
+            </a:r>
+          </a:p>
+        </p:txBody>
+      </p:sp>
+      <p:sp>
+        <p:nvSpPr>
+          <p:cNvPr id="22" name="Rectangle 21"/>
+          <p:cNvSpPr/>
+          <p:nvPr/>
+        </p:nvSpPr>
+        <p:spPr>
+          <a:xfrm>
+            <a:off x="8302752" y="1426464"/>
+            <a:ext cx="1627632" cy="603504"/>
+          </a:xfrm>
+          <a:prstGeom prst="rect">
+            <a:avLst/>
+          </a:prstGeom>
+          <a:solidFill>
+            <a:srgbClr val="FFFFFF"/>
+          </a:solidFill>
+          <a:ln>
+            <a:solidFill>
+              <a:srgbClr val="D6DCE4"/>
+            </a:solidFill>
+          </a:ln>
+          <a:effectLst/>
+        </p:spPr>
+        <p:style>
+          <a:lnRef idx="1">
+            <a:schemeClr val="accent1"/>
+          </a:lnRef>
+          <a:fillRef idx="3">
+            <a:schemeClr val="accent1"/>
+          </a:fillRef>
+          <a:effectRef idx="2">
+            <a:schemeClr val="accent1"/>
+          </a:effectRef>
+          <a:fontRef idx="minor">
+            <a:schemeClr val="lt1"/>
+          </a:fontRef>
+        </p:style>
+        <p:txBody>
+          <a:bodyPr rtlCol="0" anchor="ctr" wrap="square"/>
+          <a:lstStyle/>
+          <a:p>
+            <a:pPr algn="ctr"/>
+          </a:p>
+        </p:txBody>
+      </p:sp>
+      <p:sp>
+        <p:nvSpPr>
+          <p:cNvPr id="23" name="TextBox 22"/>
+          <p:cNvSpPr txBox="1"/>
+          <p:nvPr/>
+        </p:nvSpPr>
+        <p:spPr>
+          <a:xfrm>
+            <a:off x="8348472" y="1463040"/>
+            <a:ext cx="1536192" cy="548640"/>
+          </a:xfrm>
+          <a:prstGeom prst="rect">
+            <a:avLst/>
+          </a:prstGeom>
+          <a:noFill/>
+        </p:spPr>
+        <p:txBody>
+          <a:bodyPr wrap="square">
+            <a:spAutoFit/>
+          </a:bodyPr>
+          <a:lstStyle/>
+          <a:p>
+            <a:r>
+              <a:rPr sz="900" b="0">
+                <a:solidFill>
+                  <a:srgbClr val="35506E"/>
+                </a:solidFill>
+                <a:latin typeface="微软雅黑"/>
+              </a:rPr>
+              <a:t>LSTM 误差 0.2593</a:t>
+            </a:r>
+          </a:p>
+        </p:txBody>
+      </p:sp>
+      <p:sp>
+        <p:nvSpPr>
+          <p:cNvPr id="24" name="Rectangle 23"/>
+          <p:cNvSpPr/>
+          <p:nvPr/>
+        </p:nvSpPr>
+        <p:spPr>
+          <a:xfrm>
+            <a:off x="10003536" y="1426464"/>
+            <a:ext cx="1627632" cy="603504"/>
+          </a:xfrm>
+          <a:prstGeom prst="rect">
+            <a:avLst/>
+          </a:prstGeom>
+          <a:solidFill>
+            <a:srgbClr val="FFFFFF"/>
+          </a:solidFill>
+          <a:ln>
+            <a:solidFill>
+              <a:srgbClr val="D6DCE4"/>
+            </a:solidFill>
+          </a:ln>
+          <a:effectLst/>
+        </p:spPr>
+        <p:style>
+          <a:lnRef idx="1">
+            <a:schemeClr val="accent1"/>
+          </a:lnRef>
+          <a:fillRef idx="3">
+            <a:schemeClr val="accent1"/>
+          </a:fillRef>
+          <a:effectRef idx="2">
+            <a:schemeClr val="accent1"/>
+          </a:effectRef>
+          <a:fontRef idx="minor">
+            <a:schemeClr val="lt1"/>
+          </a:fontRef>
+        </p:style>
+        <p:txBody>
+          <a:bodyPr rtlCol="0" anchor="ctr" wrap="square"/>
+          <a:lstStyle/>
+          <a:p>
+            <a:pPr algn="ctr"/>
+          </a:p>
+        </p:txBody>
+      </p:sp>
+      <p:sp>
+        <p:nvSpPr>
+          <p:cNvPr id="25" name="TextBox 24"/>
+          <p:cNvSpPr txBox="1"/>
+          <p:nvPr/>
+        </p:nvSpPr>
+        <p:spPr>
+          <a:xfrm>
+            <a:off x="10049256" y="1463040"/>
+            <a:ext cx="1536192" cy="548640"/>
+          </a:xfrm>
+          <a:prstGeom prst="rect">
+            <a:avLst/>
+          </a:prstGeom>
+          <a:noFill/>
+        </p:spPr>
+        <p:txBody>
+          <a:bodyPr wrap="square">
+            <a:spAutoFit/>
+          </a:bodyPr>
+          <a:lstStyle/>
+          <a:p>
+            <a:r>
+              <a:rPr sz="900" b="0">
+                <a:solidFill>
+                  <a:srgbClr val="35506E"/>
+                </a:solidFill>
+                <a:latin typeface="微软雅黑"/>
+              </a:rPr>
+              <a:t>决策矩阵 6 行</a:t>
+            </a:r>
+          </a:p>
+        </p:txBody>
+      </p:sp>
+      <p:graphicFrame>
+        <p:nvGraphicFramePr>
+          <p:cNvPr id="26" name="Table 25"/>
+          <p:cNvGraphicFramePr>
+            <a:graphicFrameLocks noGrp="1"/>
+          </p:cNvGraphicFramePr>
+          <p:nvPr/>
+        </p:nvGraphicFramePr>
+        <p:xfrm>
+          <a:off x="457200" y="2212848"/>
+          <a:ext cx="11274552" cy="2834640"/>
+        </p:xfrm>
+        <a:graphic>
+          <a:graphicData uri="http://schemas.openxmlformats.org/drawingml/2006/table">
+            <a:tbl>
+              <a:tblPr firstRow="1" bandRow="1">
+                <a:tableStyleId>{5C22544A-7EE6-4342-B048-85BDC9FD1C3A}</a:tableStyleId>
+              </a:tblPr>
+              <a:tblGrid>
+                <a:gridCol w="1188720"/>
+                <a:gridCol w="5120640"/>
+                <a:gridCol w="3886200"/>
+                <a:gridCol w="1078992"/>
+              </a:tblGrid>
+              <a:tr h="566928">
+                <a:tc>
+                  <a:txBody>
+                    <a:bodyPr/>
+                    <a:lstStyle/>
+                    <a:p>
+                      <a:r>
+                        <a:rPr sz="1050" b="1">
+                          <a:solidFill>
+                            <a:srgbClr val="FFFFFF"/>
+                          </a:solidFill>
+                          <a:latin typeface="微软雅黑"/>
+                        </a:rPr>
+                        <a:t>档位</a:t>
+                      </a:r>
+                    </a:p>
+                  </a:txBody>
+                  <a:tcPr>
+                    <a:solidFill>
+                      <a:srgbClr val="010328"/>
+                    </a:solidFill>
+                  </a:tcPr>
+                </a:tc>
+                <a:tc>
+                  <a:txBody>
+                    <a:bodyPr/>
+                    <a:lstStyle/>
+                    <a:p>
+                      <a:r>
+                        <a:rPr sz="1050" b="1">
+                          <a:solidFill>
+                            <a:srgbClr val="FFFFFF"/>
+                          </a:solidFill>
+                          <a:latin typeface="微软雅黑"/>
+                        </a:rPr>
+                        <a:t>工单验收标准（原文）</a:t>
+                      </a:r>
+                    </a:p>
+                  </a:txBody>
+                  <a:tcPr>
+                    <a:solidFill>
+                      <a:srgbClr val="010328"/>
+                    </a:solidFill>
+                  </a:tcPr>
+                </a:tc>
+                <a:tc>
+                  <a:txBody>
+                    <a:bodyPr/>
+                    <a:lstStyle/>
+                    <a:p>
+                      <a:r>
+                        <a:rPr sz="1050" b="1">
+                          <a:solidFill>
+                            <a:srgbClr val="FFFFFF"/>
+                          </a:solidFill>
+                          <a:latin typeface="微软雅黑"/>
+                        </a:rPr>
+                        <a:t>本次实测判定</a:t>
+                      </a:r>
+                    </a:p>
+                  </a:txBody>
+                  <a:tcPr>
+                    <a:solidFill>
+                      <a:srgbClr val="010328"/>
+                    </a:solidFill>
+                  </a:tcPr>
+                </a:tc>
+                <a:tc>
+                  <a:txBody>
+                    <a:bodyPr/>
+                    <a:lstStyle/>
+                    <a:p>
+                      <a:r>
+                        <a:rPr sz="1050" b="1">
+                          <a:solidFill>
+                            <a:srgbClr val="FFFFFF"/>
+                          </a:solidFill>
+                          <a:latin typeface="微软雅黑"/>
+                        </a:rPr>
+                        <a:t>判定</a:t>
+                      </a:r>
+                    </a:p>
+                  </a:txBody>
+                  <a:tcPr>
+                    <a:solidFill>
+                      <a:srgbClr val="010328"/>
+                    </a:solidFill>
+                  </a:tcPr>
+                </a:tc>
+              </a:tr>
+              <a:tr h="566928">
+                <a:tc>
+                  <a:txBody>
+                    <a:bodyPr/>
+                    <a:lstStyle/>
+                    <a:p>
+                      <a:r>
+                        <a:rPr sz="1000" b="1">
+                          <a:solidFill>
+                            <a:srgbClr val="2B2F36"/>
+                          </a:solidFill>
+                          <a:latin typeface="微软雅黑"/>
+                        </a:rPr>
+                        <a:t>及格(D)</a:t>
+                      </a:r>
+                    </a:p>
+                  </a:txBody>
+                  <a:tcPr>
+                    <a:solidFill>
+                      <a:srgbClr val="FFFFFF"/>
+                    </a:solidFill>
+                  </a:tcPr>
+                </a:tc>
+                <a:tc>
+                  <a:txBody>
+                    <a:bodyPr/>
+                    <a:lstStyle/>
+                    <a:p>
+                      <a:r>
+                        <a:rPr sz="950" b="0">
+                          <a:solidFill>
+                            <a:srgbClr val="2B2F36"/>
+                          </a:solidFill>
+                          <a:latin typeface="微软雅黑"/>
+                        </a:rPr>
+                        <a:t>实测 同种子两次 RF 拟合留出 acc 一致（0.8175 vs 0.8175）；规范率 95.11%</a:t>
+                      </a:r>
+                    </a:p>
+                  </a:txBody>
+                  <a:tcPr>
+                    <a:solidFill>
+                      <a:srgbClr val="FFFFFF"/>
+                    </a:solidFill>
+                  </a:tcPr>
+                </a:tc>
+                <a:tc>
+                  <a:txBody>
+                    <a:bodyPr/>
+                    <a:lstStyle/>
+                    <a:p>
+                      <a:r>
+                        <a:rPr sz="950" b="0">
+                          <a:solidFill>
+                            <a:srgbClr val="2B2F36"/>
+                          </a:solidFill>
+                          <a:latin typeface="微软雅黑"/>
+                        </a:rPr>
+                        <a:t>规范率门槛≥70% [达标] ｜ 功能OK ｜ 指标可复现；代码规范率≥70%</a:t>
+                      </a:r>
+                    </a:p>
+                  </a:txBody>
+                  <a:tcPr>
+                    <a:solidFill>
+                      <a:srgbClr val="FFFFFF"/>
+                    </a:solidFill>
+                  </a:tcPr>
+                </a:tc>
+                <a:tc>
+                  <a:txBody>
+                    <a:bodyPr/>
+                    <a:lstStyle/>
+                    <a:p>
+                      <a:r>
+                        <a:rPr sz="1000" b="1">
+                          <a:solidFill>
+                            <a:srgbClr val="2E7D46"/>
+                          </a:solidFill>
+                          <a:latin typeface="微软雅黑"/>
+                        </a:rPr>
+                        <a:t>✓ 达标</a:t>
+                      </a:r>
+                    </a:p>
+                  </a:txBody>
+                  <a:tcPr>
+                    <a:solidFill>
+                      <a:srgbClr val="FFFFFF"/>
+                    </a:solidFill>
+                  </a:tcPr>
+                </a:tc>
+              </a:tr>
+              <a:tr h="566928">
+                <a:tc>
+                  <a:txBody>
+                    <a:bodyPr/>
+                    <a:lstStyle/>
+                    <a:p>
+                      <a:r>
+                        <a:rPr sz="1000" b="1">
+                          <a:solidFill>
+                            <a:srgbClr val="2B2F36"/>
+                          </a:solidFill>
+                          <a:latin typeface="微软雅黑"/>
+                        </a:rPr>
+                        <a:t>良好(C)</a:t>
+                      </a:r>
+                    </a:p>
+                  </a:txBody>
+                  <a:tcPr>
+                    <a:solidFill>
+                      <a:srgbClr val="F7F9FB"/>
+                    </a:solidFill>
+                  </a:tcPr>
+                </a:tc>
+                <a:tc>
+                  <a:txBody>
+                    <a:bodyPr/>
+                    <a:lstStyle/>
+                    <a:p>
+                      <a:r>
+                        <a:rPr sz="950" b="0">
+                          <a:solidFill>
+                            <a:srgbClr val="2B2F36"/>
+                          </a:solidFill>
+                          <a:latin typeface="微软雅黑"/>
+                        </a:rPr>
+                        <a:t>LSTM(torch) 窗口错误率=0.2593（线≤0.25）——兜底臂数字不认（require_real_engine=True）</a:t>
+                      </a:r>
+                    </a:p>
+                  </a:txBody>
+                  <a:tcPr>
+                    <a:solidFill>
+                      <a:srgbClr val="F7F9FB"/>
+                    </a:solidFill>
+                  </a:tcPr>
+                </a:tc>
+                <a:tc>
+                  <a:txBody>
+                    <a:bodyPr/>
+                    <a:lstStyle/>
+                    <a:p>
+                      <a:r>
+                        <a:rPr sz="950" b="0">
+                          <a:solidFill>
+                            <a:srgbClr val="2B2F36"/>
+                          </a:solidFill>
+                          <a:latin typeface="微软雅黑"/>
+                        </a:rPr>
+                        <a:t>规范率不另设线（工单仅 D 档设线，实测 95.11%） [达标] ｜ 功能OK ｜ CNN≥75% 或 LSTM 误差≤25%（仅认真卷积/真 LSTM 臂的实测数字） ｜ 实测 CN</a:t>
+                      </a:r>
+                    </a:p>
+                  </a:txBody>
+                  <a:tcPr>
+                    <a:solidFill>
+                      <a:srgbClr val="F7F9FB"/>
+                    </a:solidFill>
+                  </a:tcPr>
+                </a:tc>
+                <a:tc>
+                  <a:txBody>
+                    <a:bodyPr/>
+                    <a:lstStyle/>
+                    <a:p>
+                      <a:r>
+                        <a:rPr sz="1000" b="1">
+                          <a:solidFill>
+                            <a:srgbClr val="2E7D46"/>
+                          </a:solidFill>
+                          <a:latin typeface="微软雅黑"/>
+                        </a:rPr>
+                        <a:t>✓ 达标</a:t>
+                      </a:r>
+                    </a:p>
+                  </a:txBody>
+                  <a:tcPr>
+                    <a:solidFill>
+                      <a:srgbClr val="F7F9FB"/>
+                    </a:solidFill>
+                  </a:tcPr>
+                </a:tc>
+              </a:tr>
+              <a:tr h="566928">
+                <a:tc>
+                  <a:txBody>
+                    <a:bodyPr/>
+                    <a:lstStyle/>
+                    <a:p>
+                      <a:r>
+                        <a:rPr sz="1000" b="1">
+                          <a:solidFill>
+                            <a:srgbClr val="2B2F36"/>
+                          </a:solidFill>
+                          <a:latin typeface="微软雅黑"/>
+                        </a:rPr>
+                        <a:t>优秀(B)</a:t>
+                      </a:r>
+                    </a:p>
+                  </a:txBody>
+                  <a:tcPr>
+                    <a:solidFill>
+                      <a:srgbClr val="FFFFFF"/>
+                    </a:solidFill>
+                  </a:tcPr>
+                </a:tc>
+                <a:tc>
+                  <a:txBody>
+                    <a:bodyPr/>
+                    <a:lstStyle/>
+                    <a:p>
+                      <a:r>
+                        <a:rPr sz="950" b="0">
+                          <a:solidFill>
+                            <a:srgbClr val="2B2F36"/>
+                          </a:solidFill>
+                          <a:latin typeface="微软雅黑"/>
+                        </a:rPr>
+                        <a:t>实测 两轮对比：两臂真引擎同口径实测（acc 差 +0.2593、秒差 -0.248s）；决策记录 445 字（线 120）</a:t>
+                      </a:r>
+                    </a:p>
+                  </a:txBody>
+                  <a:tcPr>
+                    <a:solidFill>
+                      <a:srgbClr val="FFFFFF"/>
+                    </a:solidFill>
+                  </a:tcPr>
+                </a:tc>
+                <a:tc>
+                  <a:txBody>
+                    <a:bodyPr/>
+                    <a:lstStyle/>
+                    <a:p>
+                      <a:r>
+                        <a:rPr sz="950" b="0">
+                          <a:solidFill>
+                            <a:srgbClr val="2B2F36"/>
+                          </a:solidFill>
+                          <a:latin typeface="微软雅黑"/>
+                        </a:rPr>
+                        <a:t>规范率不另设线（工单仅 D 档设线，实测 95.11%） [达标] ｜ 功能OK ｜ CNN vs LSTM 两轮实测对比齐备；决策记录完整（竞标胜负/评委加分另人工）</a:t>
+                      </a:r>
+                    </a:p>
+                  </a:txBody>
+                  <a:tcPr>
+                    <a:solidFill>
+                      <a:srgbClr val="FFFFFF"/>
+                    </a:solidFill>
+                  </a:tcPr>
+                </a:tc>
+                <a:tc>
+                  <a:txBody>
+                    <a:bodyPr/>
+                    <a:lstStyle/>
+                    <a:p>
+                      <a:r>
+                        <a:rPr sz="1000" b="1">
+                          <a:solidFill>
+                            <a:srgbClr val="2E7D46"/>
+                          </a:solidFill>
+                          <a:latin typeface="微软雅黑"/>
+                        </a:rPr>
+                        <a:t>✓ 达标</a:t>
+                      </a:r>
+                    </a:p>
+                  </a:txBody>
+                  <a:tcPr>
+                    <a:solidFill>
+                      <a:srgbClr val="FFFFFF"/>
+                    </a:solidFill>
+                  </a:tcPr>
+                </a:tc>
+              </a:tr>
+              <a:tr h="566928">
+                <a:tc>
+                  <a:txBody>
+                    <a:bodyPr/>
+                    <a:lstStyle/>
+                    <a:p>
+                      <a:r>
+                        <a:rPr sz="1000" b="1">
+                          <a:solidFill>
+                            <a:srgbClr val="2B2F36"/>
+                          </a:solidFill>
+                          <a:latin typeface="微软雅黑"/>
+                        </a:rPr>
+                        <a:t>优(A)</a:t>
+                      </a:r>
+                    </a:p>
+                  </a:txBody>
+                  <a:tcPr>
+                    <a:solidFill>
+                      <a:srgbClr val="F7F9FB"/>
+                    </a:solidFill>
+                  </a:tcPr>
+                </a:tc>
+                <a:tc>
+                  <a:txBody>
+                    <a:bodyPr/>
+                    <a:lstStyle/>
+                    <a:p>
+                      <a:r>
+                        <a:rPr sz="950" b="0">
+                          <a:solidFill>
+                            <a:srgbClr val="2B2F36"/>
+                          </a:solidFill>
+                          <a:latin typeface="微软雅黑"/>
+                        </a:rPr>
+                        <a:t>实测 矩阵 6 行（线≥4）；权重 acc/speed/env=0.5/0.3/0.2 和=1.0；结论成文 136 字（线≥20）</a:t>
+                      </a:r>
+                    </a:p>
+                  </a:txBody>
+                  <a:tcPr>
+                    <a:solidFill>
+                      <a:srgbClr val="F7F9FB"/>
+                    </a:solidFill>
+                  </a:tcPr>
+                </a:tc>
+                <a:tc>
+                  <a:txBody>
+                    <a:bodyPr/>
+                    <a:lstStyle/>
+                    <a:p>
+                      <a:r>
+                        <a:rPr sz="950" b="0">
+                          <a:solidFill>
+                            <a:srgbClr val="2B2F36"/>
+                          </a:solidFill>
+                          <a:latin typeface="微软雅黑"/>
+                        </a:rPr>
+                        <a:t>规范率不另设线（工单仅 D 档设线，实测 95.11%） [达标] ｜ 功能OK ｜ 选型决策矩阵：候选×权重×实测得分→结论</a:t>
+                      </a:r>
+                    </a:p>
+                  </a:txBody>
+                  <a:tcPr>
+                    <a:solidFill>
+                      <a:srgbClr val="F7F9FB"/>
+                    </a:solidFill>
+                  </a:tcPr>
+                </a:tc>
+                <a:tc>
+                  <a:txBody>
+                    <a:bodyPr/>
+                    <a:lstStyle/>
+                    <a:p>
+                      <a:r>
+                        <a:rPr sz="1000" b="1">
+                          <a:solidFill>
+                            <a:srgbClr val="2E7D46"/>
+                          </a:solidFill>
+                          <a:latin typeface="微软雅黑"/>
+                        </a:rPr>
+                        <a:t>✓ 达标</a:t>
+                      </a:r>
+                    </a:p>
+                  </a:txBody>
+                  <a:tcPr>
+                    <a:solidFill>
+                      <a:srgbClr val="F7F9FB"/>
+                    </a:solidFill>
+                  </a:tcPr>
+                </a:tc>
+              </a:tr>
+            </a:tbl>
+          </a:graphicData>
+        </a:graphic>
+      </p:graphicFrame>
+      <p:sp>
+        <p:nvSpPr>
+          <p:cNvPr id="27" name="Rectangle 26"/>
+          <p:cNvSpPr/>
+          <p:nvPr/>
+        </p:nvSpPr>
+        <p:spPr>
+          <a:xfrm>
+            <a:off x="457200" y="5138928"/>
+            <a:ext cx="11274552" cy="1261872"/>
+          </a:xfrm>
+          <a:prstGeom prst="rect">
+            <a:avLst/>
+          </a:prstGeom>
+          <a:solidFill>
+            <a:srgbClr val="FFF7E8"/>
+          </a:solidFill>
+          <a:ln>
+            <a:solidFill>
+              <a:srgbClr val="E8C88A"/>
+            </a:solidFill>
+          </a:ln>
+          <a:effectLst/>
+        </p:spPr>
+        <p:style>
+          <a:lnRef idx="1">
+            <a:schemeClr val="accent1"/>
+          </a:lnRef>
+          <a:fillRef idx="3">
+            <a:schemeClr val="accent1"/>
+          </a:fillRef>
+          <a:effectRef idx="2">
+            <a:schemeClr val="accent1"/>
+          </a:effectRef>
+          <a:fontRef idx="minor">
+            <a:schemeClr val="lt1"/>
+          </a:fontRef>
+        </p:style>
+        <p:txBody>
+          <a:bodyPr rtlCol="0" anchor="ctr" wrap="square"/>
+          <a:lstStyle/>
+          <a:p>
+            <a:pPr algn="ctr"/>
+          </a:p>
+        </p:txBody>
+      </p:sp>
+      <p:sp>
+        <p:nvSpPr>
+          <p:cNvPr id="28" name="TextBox 27"/>
+          <p:cNvSpPr txBox="1"/>
+          <p:nvPr/>
+        </p:nvSpPr>
+        <p:spPr>
+          <a:xfrm>
+            <a:off x="621792" y="5212080"/>
+            <a:ext cx="10927080" cy="1133856"/>
+          </a:xfrm>
+          <a:prstGeom prst="rect">
+            <a:avLst/>
+          </a:prstGeom>
+          <a:noFill/>
+        </p:spPr>
+        <p:txBody>
+          <a:bodyPr wrap="square">
+            <a:spAutoFit/>
+          </a:bodyPr>
+          <a:lstStyle/>
+          <a:p>
+            <a:r>
+              <a:rPr sz="1050" b="0">
+                <a:solidFill>
+                  <a:srgbClr val="6B4E16"/>
+                </a:solidFill>
+                <a:latin typeface="微软雅黑"/>
+              </a:rPr>
+              <a:t>人工答辩项 0 条：四档门槛均由代码实测判定</a:t>
+            </a:r>
+          </a:p>
+          <a:p>
+            <a:r>
+              <a:rPr sz="1050" b="0">
+                <a:solidFill>
+                  <a:srgbClr val="6B4E16"/>
+                </a:solidFill>
+                <a:latin typeface="微软雅黑"/>
+              </a:rPr>
+              <a:t>档位是算出来的：判定值由 run.py 本次真跑产生；工单未给数字的门槛在报告里标注为「兜底口径·非工单数字」。</a:t>
+            </a:r>
+          </a:p>
+        </p:txBody>
+      </p:sp>
+    </p:spTree>
+  </p:cSld>
+  <p:clrMapOvr>
+    <a:masterClrMapping/>
+  </p:clrMapOvr>
+</p:sld>
+</file>
+
+<file path=ppt/slides/slide12.xml><?xml version="1.0" encoding="utf-8"?>
+<p:sld xmlns:a="http://schemas.openxmlformats.org/drawingml/2006/main" xmlns:p="http://schemas.openxmlformats.org/presentationml/2006/main" xmlns:r="http://schemas.openxmlformats.org/officeDocument/2006/relationships">
+  <p:cSld>
+    <p:spTree>
+      <p:nvGrpSpPr>
+        <p:cNvPr id="1" name=""/>
+        <p:cNvGrpSpPr/>
+        <p:nvPr/>
+      </p:nvGrpSpPr>
+      <p:grpSpPr/>
+      <p:sp>
+        <p:nvSpPr>
+          <p:cNvPr id="2" name="Rectangle 1"/>
+          <p:cNvSpPr/>
+          <p:nvPr/>
+        </p:nvSpPr>
+        <p:spPr>
+          <a:xfrm>
+            <a:off x="0" y="0"/>
+            <a:ext cx="12192000" cy="1150000"/>
+          </a:xfrm>
+          <a:prstGeom prst="rect">
+            <a:avLst/>
+          </a:prstGeom>
+          <a:solidFill>
+            <a:srgbClr val="010328"/>
+          </a:solidFill>
+          <a:ln>
+            <a:noFill/>
+          </a:ln>
+          <a:effectLst/>
+        </p:spPr>
+        <p:style>
+          <a:lnRef idx="1">
+            <a:schemeClr val="accent1"/>
+          </a:lnRef>
+          <a:fillRef idx="3">
+            <a:schemeClr val="accent1"/>
+          </a:fillRef>
+          <a:effectRef idx="2">
+            <a:schemeClr val="accent1"/>
+          </a:effectRef>
+          <a:fontRef idx="minor">
+            <a:schemeClr val="lt1"/>
+          </a:fontRef>
+        </p:style>
+        <p:txBody>
+          <a:bodyPr rtlCol="0" anchor="ctr"/>
+          <a:lstStyle/>
+          <a:p>
+            <a:pPr algn="ctr"/>
+          </a:p>
+        </p:txBody>
+      </p:sp>
+      <p:sp>
+        <p:nvSpPr>
+          <p:cNvPr id="3" name="Rectangle 2"/>
+          <p:cNvSpPr/>
+          <p:nvPr/>
+        </p:nvSpPr>
+        <p:spPr>
+          <a:xfrm>
+            <a:off x="0" y="1150000"/>
+            <a:ext cx="2600000" cy="70000"/>
+          </a:xfrm>
+          <a:prstGeom prst="rect">
+            <a:avLst/>
+          </a:prstGeom>
+          <a:solidFill>
+            <a:srgbClr val="F5670F"/>
+          </a:solidFill>
+          <a:ln>
+            <a:noFill/>
+          </a:ln>
+          <a:effectLst/>
+        </p:spPr>
+        <p:style>
+          <a:lnRef idx="1">
+            <a:schemeClr val="accent1"/>
+          </a:lnRef>
+          <a:fillRef idx="3">
+            <a:schemeClr val="accent1"/>
+          </a:fillRef>
+          <a:effectRef idx="2">
+            <a:schemeClr val="accent1"/>
+          </a:effectRef>
+          <a:fontRef idx="minor">
+            <a:schemeClr val="lt1"/>
+          </a:fontRef>
+        </p:style>
+        <p:txBody>
+          <a:bodyPr rtlCol="0" anchor="ctr"/>
+          <a:lstStyle/>
+          <a:p>
+            <a:pPr algn="ctr"/>
+          </a:p>
+        </p:txBody>
+      </p:sp>
+      <p:sp>
+        <p:nvSpPr>
+          <p:cNvPr id="4" name="TextBox 3"/>
+          <p:cNvSpPr txBox="1"/>
+          <p:nvPr/>
+        </p:nvSpPr>
+        <p:spPr>
+          <a:xfrm>
+            <a:off x="700000" y="300000"/>
+            <a:ext cx="10792000" cy="700000"/>
+          </a:xfrm>
+          <a:prstGeom prst="rect">
+            <a:avLst/>
+          </a:prstGeom>
+          <a:noFill/>
+        </p:spPr>
+        <p:txBody>
+          <a:bodyPr wrap="square" anchor="t">
+            <a:spAutoFit/>
+          </a:bodyPr>
+          <a:lstStyle/>
+          <a:p>
+            <a:pPr algn="l">
+              <a:lnSpc>
+                <a:spcPct val="110000"/>
+              </a:lnSpc>
+              <a:spcAft>
+                <a:spcPts val="600"/>
+              </a:spcAft>
+            </a:pPr>
+            <a:r>
+              <a:rPr sz="2400" b="1">
+                <a:solidFill>
+                  <a:srgbClr val="FFFFFF"/>
+                </a:solidFill>
+                <a:latin typeface="微软雅黑"/>
+              </a:rPr>
+              <a:t>实跑截图证据 · m23b_bidding</a:t>
+            </a:r>
+          </a:p>
+        </p:txBody>
+      </p:sp>
+      <p:sp>
+        <p:nvSpPr>
+          <p:cNvPr id="11" name="Rectangle 10"/>
+          <p:cNvSpPr/>
+          <p:nvPr/>
+        </p:nvSpPr>
+        <p:spPr>
+          <a:xfrm>
+            <a:off x="500000" y="6500000"/>
+            <a:ext cx="11100000" cy="20000"/>
+          </a:xfrm>
+          <a:prstGeom prst="rect">
+            <a:avLst/>
+          </a:prstGeom>
+          <a:solidFill>
+            <a:srgbClr val="C9D4EE"/>
+          </a:solidFill>
+          <a:ln>
+            <a:noFill/>
+          </a:ln>
+          <a:effectLst/>
+        </p:spPr>
+        <p:style>
+          <a:lnRef idx="1">
+            <a:schemeClr val="accent1"/>
+          </a:lnRef>
+          <a:fillRef idx="3">
+            <a:schemeClr val="accent1"/>
+          </a:fillRef>
+          <a:effectRef idx="2">
+            <a:schemeClr val="accent1"/>
+          </a:effectRef>
+          <a:fontRef idx="minor">
+            <a:schemeClr val="lt1"/>
+          </a:fontRef>
+        </p:style>
+        <p:txBody>
+          <a:bodyPr rtlCol="0" anchor="ctr"/>
+          <a:lstStyle/>
+          <a:p>
+            <a:pPr algn="ctr"/>
+          </a:p>
+        </p:txBody>
+      </p:sp>
+      <p:sp>
+        <p:nvSpPr>
+          <p:cNvPr id="12" name="TextBox 11"/>
+          <p:cNvSpPr txBox="1"/>
+          <p:nvPr/>
+        </p:nvSpPr>
+        <p:spPr>
+          <a:xfrm>
+            <a:off x="500000" y="6540000"/>
+            <a:ext cx="7000000" cy="300000"/>
+          </a:xfrm>
+          <a:prstGeom prst="rect">
+            <a:avLst/>
+          </a:prstGeom>
+          <a:noFill/>
+        </p:spPr>
+        <p:txBody>
+          <a:bodyPr wrap="square" anchor="t">
+            <a:spAutoFit/>
+          </a:bodyPr>
+          <a:lstStyle/>
+          <a:p>
+            <a:pPr algn="l">
+              <a:lnSpc>
+                <a:spcPct val="110000"/>
+              </a:lnSpc>
+              <a:spcAft>
+                <a:spcPts val="600"/>
+              </a:spcAft>
+            </a:pPr>
+            <a:r>
+              <a:rPr sz="1000" b="0">
+                <a:solidFill>
+                  <a:srgbClr val="8A97B5"/>
+                </a:solidFill>
+                <a:latin typeface="微软雅黑"/>
+              </a:rPr>
+              <a:t>两江智造集团 · AI应用基础48课时版</a:t>
+            </a:r>
+          </a:p>
+        </p:txBody>
+      </p:sp>
+      <p:sp>
+        <p:nvSpPr>
+          <p:cNvPr id="13" name="TextBox 12"/>
+          <p:cNvSpPr txBox="1"/>
+          <p:nvPr/>
+        </p:nvSpPr>
+        <p:spPr>
+          <a:xfrm>
+            <a:off x="10600000" y="6540000"/>
+            <a:ext cx="1000000" cy="300000"/>
+          </a:xfrm>
+          <a:prstGeom prst="rect">
+            <a:avLst/>
+          </a:prstGeom>
+          <a:noFill/>
+        </p:spPr>
+        <p:txBody>
+          <a:bodyPr wrap="square" anchor="t">
+            <a:spAutoFit/>
+          </a:bodyPr>
+          <a:lstStyle/>
+          <a:p>
+            <a:pPr algn="r">
+              <a:lnSpc>
+                <a:spcPct val="110000"/>
+              </a:lnSpc>
+              <a:spcAft>
+                <a:spcPts val="600"/>
+              </a:spcAft>
+            </a:pPr>
+            <a:r>
+              <a:rPr sz="1000" b="0">
+                <a:solidFill>
+                  <a:srgbClr val="8A97B5"/>
+                </a:solidFill>
+                <a:latin typeface="微软雅黑"/>
+              </a:rPr>
+              <a:t>9 / 12</a:t>
+            </a:r>
+          </a:p>
+        </p:txBody>
+      </p:sp>
+      <p:sp>
+        <p:nvSpPr>
+          <p:cNvPr id="14" name="Rectangle 13"/>
+          <p:cNvSpPr/>
+          <p:nvPr/>
+        </p:nvSpPr>
+        <p:spPr>
+          <a:xfrm>
+            <a:off x="457200" y="1481328"/>
+            <a:ext cx="5486400" cy="2304288"/>
+          </a:xfrm>
+          <a:prstGeom prst="rect">
+            <a:avLst/>
+          </a:prstGeom>
+          <a:solidFill>
+            <a:srgbClr val="FFFFFF"/>
+          </a:solidFill>
+          <a:ln>
+            <a:solidFill>
+              <a:srgbClr val="D6DCE4"/>
+            </a:solidFill>
+          </a:ln>
+          <a:effectLst/>
+        </p:spPr>
+        <p:style>
+          <a:lnRef idx="1">
+            <a:schemeClr val="accent1"/>
+          </a:lnRef>
+          <a:fillRef idx="3">
+            <a:schemeClr val="accent1"/>
+          </a:fillRef>
+          <a:effectRef idx="2">
+            <a:schemeClr val="accent1"/>
+          </a:effectRef>
+          <a:fontRef idx="minor">
+            <a:schemeClr val="lt1"/>
+          </a:fontRef>
+        </p:style>
+        <p:txBody>
+          <a:bodyPr rtlCol="0" anchor="ctr" wrap="square"/>
+          <a:lstStyle/>
+          <a:p>
+            <a:pPr algn="ctr"/>
+          </a:p>
+        </p:txBody>
+      </p:sp>
+      <p:sp>
+        <p:nvSpPr>
+          <p:cNvPr id="15" name="TextBox 14"/>
+          <p:cNvSpPr txBox="1"/>
+          <p:nvPr/>
+        </p:nvSpPr>
+        <p:spPr>
+          <a:xfrm>
+            <a:off x="530352" y="1517904"/>
+            <a:ext cx="5340096" cy="237744"/>
+          </a:xfrm>
+          <a:prstGeom prst="rect">
+            <a:avLst/>
+          </a:prstGeom>
+          <a:noFill/>
+        </p:spPr>
+        <p:txBody>
+          <a:bodyPr wrap="square">
+            <a:spAutoFit/>
+          </a:bodyPr>
+          <a:lstStyle/>
+          <a:p>
+            <a:r>
+              <a:rPr sz="950" b="1">
+                <a:solidFill>
+                  <a:srgbClr val="010328"/>
+                </a:solidFill>
+                <a:latin typeface="微软雅黑"/>
+              </a:rPr>
+              <a:t>① run.py 实跑终端输出（逐字捕获）</a:t>
+            </a:r>
+          </a:p>
+        </p:txBody>
+      </p:sp>
+      <p:pic>
+        <p:nvPicPr>
+          <p:cNvPr id="16" name="Picture 15" descr="shot_run.png"/>
+          <p:cNvPicPr>
+            <a:picLocks noChangeAspect="1"/>
+          </p:cNvPicPr>
+          <p:nvPr/>
+        </p:nvPicPr>
+        <p:blipFill>
+          <a:blip r:embed="rId2"/>
+          <a:stretch>
+            <a:fillRect/>
+          </a:stretch>
+        </p:blipFill>
+        <p:spPr>
+          <a:xfrm>
+            <a:off x="964038" y="1773936"/>
+            <a:ext cx="4472722" cy="1956816"/>
+          </a:xfrm>
+          <a:prstGeom prst="rect">
+            <a:avLst/>
+          </a:prstGeom>
+        </p:spPr>
+      </p:pic>
+      <p:sp>
+        <p:nvSpPr>
+          <p:cNvPr id="17" name="Rectangle 16"/>
+          <p:cNvSpPr/>
+          <p:nvPr/>
+        </p:nvSpPr>
+        <p:spPr>
+          <a:xfrm>
+            <a:off x="6327648" y="1481328"/>
+            <a:ext cx="5486400" cy="2304288"/>
+          </a:xfrm>
+          <a:prstGeom prst="rect">
+            <a:avLst/>
+          </a:prstGeom>
+          <a:solidFill>
+            <a:srgbClr val="FFFFFF"/>
+          </a:solidFill>
+          <a:ln>
+            <a:solidFill>
+              <a:srgbClr val="D6DCE4"/>
+            </a:solidFill>
+          </a:ln>
+          <a:effectLst/>
+        </p:spPr>
+        <p:style>
+          <a:lnRef idx="1">
+            <a:schemeClr val="accent1"/>
+          </a:lnRef>
+          <a:fillRef idx="3">
+            <a:schemeClr val="accent1"/>
+          </a:fillRef>
+          <a:effectRef idx="2">
+            <a:schemeClr val="accent1"/>
+          </a:effectRef>
+          <a:fontRef idx="minor">
+            <a:schemeClr val="lt1"/>
+          </a:fontRef>
+        </p:style>
+        <p:txBody>
+          <a:bodyPr rtlCol="0" anchor="ctr" wrap="square"/>
+          <a:lstStyle/>
+          <a:p>
+            <a:pPr algn="ctr"/>
+          </a:p>
+        </p:txBody>
+      </p:sp>
+      <p:sp>
+        <p:nvSpPr>
+          <p:cNvPr id="18" name="TextBox 17"/>
+          <p:cNvSpPr txBox="1"/>
+          <p:nvPr/>
+        </p:nvSpPr>
+        <p:spPr>
+          <a:xfrm>
+            <a:off x="6400800" y="1517904"/>
+            <a:ext cx="5340096" cy="237744"/>
+          </a:xfrm>
+          <a:prstGeom prst="rect">
+            <a:avLst/>
+          </a:prstGeom>
+          <a:noFill/>
+        </p:spPr>
+        <p:txBody>
+          <a:bodyPr wrap="square">
+            <a:spAutoFit/>
+          </a:bodyPr>
+          <a:lstStyle/>
+          <a:p>
+            <a:r>
+              <a:rPr sz="950" b="1">
+                <a:solidFill>
+                  <a:srgbClr val="010328"/>
+                </a:solidFill>
+                <a:latin typeface="微软雅黑"/>
+              </a:rPr>
+              <a:t>② pytest 全绿终端输出（逐字捕获）</a:t>
+            </a:r>
+          </a:p>
+        </p:txBody>
+      </p:sp>
+      <p:pic>
+        <p:nvPicPr>
+          <p:cNvPr id="19" name="Picture 18" descr="shot_test.png"/>
+          <p:cNvPicPr>
+            <a:picLocks noChangeAspect="1"/>
+          </p:cNvPicPr>
+          <p:nvPr/>
+        </p:nvPicPr>
+        <p:blipFill>
+          <a:blip r:embed="rId3"/>
+          <a:stretch>
+            <a:fillRect/>
+          </a:stretch>
+        </p:blipFill>
+        <p:spPr>
+          <a:xfrm>
+            <a:off x="6834486" y="1773936"/>
+            <a:ext cx="4472722" cy="1956816"/>
+          </a:xfrm>
+          <a:prstGeom prst="rect">
+            <a:avLst/>
+          </a:prstGeom>
+        </p:spPr>
+      </p:pic>
+      <p:sp>
+        <p:nvSpPr>
+          <p:cNvPr id="20" name="Rectangle 19"/>
+          <p:cNvSpPr/>
+          <p:nvPr/>
+        </p:nvSpPr>
+        <p:spPr>
+          <a:xfrm>
+            <a:off x="457200" y="3877056"/>
+            <a:ext cx="5486400" cy="2304288"/>
+          </a:xfrm>
+          <a:prstGeom prst="rect">
+            <a:avLst/>
+          </a:prstGeom>
+          <a:solidFill>
+            <a:srgbClr val="FFFFFF"/>
+          </a:solidFill>
+          <a:ln>
+            <a:solidFill>
+              <a:srgbClr val="D6DCE4"/>
+            </a:solidFill>
+          </a:ln>
+          <a:effectLst/>
+        </p:spPr>
+        <p:style>
+          <a:lnRef idx="1">
+            <a:schemeClr val="accent1"/>
+          </a:lnRef>
+          <a:fillRef idx="3">
+            <a:schemeClr val="accent1"/>
+          </a:fillRef>
+          <a:effectRef idx="2">
+            <a:schemeClr val="accent1"/>
+          </a:effectRef>
+          <a:fontRef idx="minor">
+            <a:schemeClr val="lt1"/>
+          </a:fontRef>
+        </p:style>
+        <p:txBody>
+          <a:bodyPr rtlCol="0" anchor="ctr" wrap="square"/>
+          <a:lstStyle/>
+          <a:p>
+            <a:pPr algn="ctr"/>
+          </a:p>
+        </p:txBody>
+      </p:sp>
+      <p:sp>
+        <p:nvSpPr>
+          <p:cNvPr id="21" name="TextBox 20"/>
+          <p:cNvSpPr txBox="1"/>
+          <p:nvPr/>
+        </p:nvSpPr>
+        <p:spPr>
+          <a:xfrm>
+            <a:off x="530352" y="3913632"/>
+            <a:ext cx="5340096" cy="237744"/>
+          </a:xfrm>
+          <a:prstGeom prst="rect">
+            <a:avLst/>
+          </a:prstGeom>
+          <a:noFill/>
+        </p:spPr>
+        <p:txBody>
+          <a:bodyPr wrap="square">
+            <a:spAutoFit/>
+          </a:bodyPr>
+          <a:lstStyle/>
+          <a:p>
+            <a:r>
+              <a:rPr sz="950" b="1">
+                <a:solidFill>
+                  <a:srgbClr val="010328"/>
+                </a:solidFill>
+                <a:latin typeface="微软雅黑"/>
+              </a:rPr>
+              <a:t>③ report.txt「验收档位判定（实测）」段</a:t>
+            </a:r>
+          </a:p>
+        </p:txBody>
+      </p:sp>
+      <p:pic>
+        <p:nvPicPr>
+          <p:cNvPr id="22" name="Picture 21" descr="shot_report.png"/>
+          <p:cNvPicPr>
+            <a:picLocks noChangeAspect="1"/>
+          </p:cNvPicPr>
+          <p:nvPr/>
+        </p:nvPicPr>
+        <p:blipFill>
+          <a:blip r:embed="rId4"/>
+          <a:stretch>
+            <a:fillRect/>
+          </a:stretch>
+        </p:blipFill>
+        <p:spPr>
+          <a:xfrm>
+            <a:off x="964038" y="4169664"/>
+            <a:ext cx="4472722" cy="1956816"/>
+          </a:xfrm>
+          <a:prstGeom prst="rect">
+            <a:avLst/>
+          </a:prstGeom>
+        </p:spPr>
+      </p:pic>
+      <p:sp>
+        <p:nvSpPr>
+          <p:cNvPr id="23" name="Rectangle 22"/>
+          <p:cNvSpPr/>
+          <p:nvPr/>
+        </p:nvSpPr>
+        <p:spPr>
+          <a:xfrm>
+            <a:off x="6327648" y="3877056"/>
+            <a:ext cx="5486400" cy="2304288"/>
+          </a:xfrm>
+          <a:prstGeom prst="rect">
+            <a:avLst/>
+          </a:prstGeom>
+          <a:solidFill>
+            <a:srgbClr val="F7F9FB"/>
+          </a:solidFill>
+          <a:ln>
+            <a:solidFill>
+              <a:srgbClr val="D6DCE4"/>
+            </a:solidFill>
+          </a:ln>
+          <a:effectLst/>
+        </p:spPr>
+        <p:style>
+          <a:lnRef idx="1">
+            <a:schemeClr val="accent1"/>
+          </a:lnRef>
+          <a:fillRef idx="3">
+            <a:schemeClr val="accent1"/>
+          </a:fillRef>
+          <a:effectRef idx="2">
+            <a:schemeClr val="accent1"/>
+          </a:effectRef>
+          <a:fontRef idx="minor">
+            <a:schemeClr val="lt1"/>
+          </a:fontRef>
+        </p:style>
+        <p:txBody>
+          <a:bodyPr rtlCol="0" anchor="ctr" wrap="square"/>
+          <a:lstStyle/>
+          <a:p>
+            <a:pPr algn="ctr"/>
+          </a:p>
+        </p:txBody>
+      </p:sp>
+      <p:sp>
+        <p:nvSpPr>
+          <p:cNvPr id="24" name="TextBox 23"/>
+          <p:cNvSpPr txBox="1"/>
+          <p:nvPr/>
+        </p:nvSpPr>
+        <p:spPr>
+          <a:xfrm>
+            <a:off x="6400800" y="3913632"/>
+            <a:ext cx="5340096" cy="237744"/>
+          </a:xfrm>
+          <a:prstGeom prst="rect">
+            <a:avLst/>
+          </a:prstGeom>
+          <a:noFill/>
+        </p:spPr>
+        <p:txBody>
+          <a:bodyPr wrap="square">
+            <a:spAutoFit/>
+          </a:bodyPr>
+          <a:lstStyle/>
+          <a:p>
+            <a:r>
+              <a:rPr sz="950" b="1">
+                <a:solidFill>
+                  <a:srgbClr val="010328"/>
+                </a:solidFill>
+                <a:latin typeface="微软雅黑"/>
+              </a:rPr>
+              <a:t>④ 采集口径（可复现）</a:t>
+            </a:r>
+          </a:p>
+        </p:txBody>
+      </p:sp>
+      <p:sp>
+        <p:nvSpPr>
+          <p:cNvPr id="25" name="TextBox 24"/>
+          <p:cNvSpPr txBox="1"/>
+          <p:nvPr/>
+        </p:nvSpPr>
+        <p:spPr>
+          <a:xfrm>
+            <a:off x="6437376" y="4187952"/>
+            <a:ext cx="5266944" cy="1920240"/>
+          </a:xfrm>
+          <a:prstGeom prst="rect">
+            <a:avLst/>
+          </a:prstGeom>
+          <a:noFill/>
+        </p:spPr>
+        <p:txBody>
+          <a:bodyPr wrap="square">
+            <a:spAutoFit/>
+          </a:bodyPr>
+          <a:lstStyle/>
+          <a:p>
+            <a:r>
+              <a:rPr sz="950" b="0">
+                <a:solidFill>
+                  <a:srgbClr val="2B2F36"/>
+                </a:solidFill>
+                <a:latin typeface="微软雅黑"/>
+              </a:rPr>
+              <a:t>项目：05-AI应用基础48课时版/工程化项目/m23b_bidding/</a:t>
+            </a:r>
+          </a:p>
+          <a:p>
+            <a:r>
+              <a:rPr sz="950" b="0">
+                <a:solidFill>
+                  <a:srgbClr val="2B2F36"/>
+                </a:solidFill>
+                <a:latin typeface="微软雅黑"/>
+              </a:rPr>
+              <a:t>命令：/opt/anaconda3/bin/python run.py ｜ /opt/anaconda3/bin/python -m pytest -q</a:t>
+            </a:r>
+          </a:p>
+          <a:p>
+            <a:r>
+              <a:rPr sz="950" b="0">
+                <a:solidFill>
+                  <a:srgbClr val="2B2F36"/>
+                </a:solidFill>
+                <a:latin typeface="微软雅黑"/>
+              </a:rPr>
+              <a:t>采集：工具/ppt97/capture97.py（2026-10-28 10:48 真跑逐字捕获输出）</a:t>
+            </a:r>
+          </a:p>
+          <a:p>
+            <a:r>
+              <a:rPr sz="950" b="0">
+                <a:solidFill>
+                  <a:srgbClr val="2B2F36"/>
+                </a:solidFill>
+                <a:latin typeface="微软雅黑"/>
+              </a:rPr>
+              <a:t>渲染：工具/ppt97/terminal_png.py（终端截图，不改写任何数字）</a:t>
+            </a:r>
+          </a:p>
+          <a:p>
+            <a:r>
+              <a:rPr sz="950" b="0">
+                <a:solidFill>
+                  <a:srgbClr val="2B2F36"/>
+                </a:solidFill>
+                <a:latin typeface="微软雅黑"/>
+              </a:rPr>
+              <a:t>退出码：run=0 ｜ pytest=0</a:t>
+            </a:r>
+          </a:p>
+          <a:p>
+            <a:r>
+              <a:rPr sz="950" b="0">
+                <a:solidFill>
+                  <a:srgbClr val="2B2F36"/>
+                </a:solidFill>
+                <a:latin typeface="微软雅黑"/>
+              </a:rPr>
+              <a:t>档位判定取自 output/report.txt「验收档位判定（实测）」段</a:t>
+            </a:r>
+          </a:p>
+        </p:txBody>
+      </p:sp>
+      <p:sp>
+        <p:nvSpPr>
+          <p:cNvPr id="26" name="TextBox 25"/>
+          <p:cNvSpPr txBox="1"/>
+          <p:nvPr/>
+        </p:nvSpPr>
+        <p:spPr>
+          <a:xfrm>
+            <a:off x="457200" y="6254496"/>
+            <a:ext cx="11247120" cy="201168"/>
+          </a:xfrm>
+          <a:prstGeom prst="rect">
+            <a:avLst/>
+          </a:prstGeom>
+          <a:noFill/>
+        </p:spPr>
+        <p:txBody>
+          <a:bodyPr wrap="square">
+            <a:spAutoFit/>
+          </a:bodyPr>
+          <a:lstStyle/>
+          <a:p>
+            <a:r>
+              <a:rPr sz="900" b="0">
+                <a:solidFill>
+                  <a:srgbClr val="7A8698"/>
+                </a:solidFill>
+                <a:latin typeface="微软雅黑"/>
+              </a:rPr>
+              <a:t>截图内容逐字取自 工具/ppt97/evidence/m23b_bidding/（capture97.py 真跑捕获，未改写数字）</a:t>
+            </a:r>
+          </a:p>
+        </p:txBody>
+      </p:sp>
+    </p:spTree>
+  </p:cSld>
+  <p:clrMapOvr>
+    <a:masterClrMapping/>
+  </p:clrMapOvr>
+</p:sld>
+</file>
+
 <file path=ppt/slides/slide2.xml><?xml version="1.0" encoding="utf-8"?>
 <p:sld xmlns:a="http://schemas.openxmlformats.org/drawingml/2006/main" xmlns:p="http://schemas.openxmlformats.org/presentationml/2006/main" xmlns:r="http://schemas.openxmlformats.org/officeDocument/2006/relationships">
   <p:cSld>
@@ -5143,7 +7270,7 @@
                 </a:solidFill>
                 <a:latin typeface="微软雅黑"/>
               </a:rPr>
-              <a:t>2 / 10</a:t>
+              <a:t>2 / 12</a:t>
             </a:r>
           </a:p>
         </p:txBody>
@@ -5617,7 +7744,7 @@
                 </a:solidFill>
                 <a:latin typeface="微软雅黑"/>
               </a:rPr>
-              <a:t>3 / 10</a:t>
+              <a:t>3 / 12</a:t>
             </a:r>
           </a:p>
         </p:txBody>
@@ -6409,7 +8536,7 @@
                 </a:solidFill>
                 <a:latin typeface="微软雅黑"/>
               </a:rPr>
-              <a:t>4 / 10</a:t>
+              <a:t>4 / 12</a:t>
             </a:r>
           </a:p>
         </p:txBody>
@@ -7080,7 +9207,7 @@
                 </a:solidFill>
                 <a:latin typeface="微软雅黑"/>
               </a:rPr>
-              <a:t>5 / 10</a:t>
+              <a:t>5 / 12</a:t>
             </a:r>
           </a:p>
         </p:txBody>
@@ -7356,7 +9483,7 @@
                 </a:solidFill>
                 <a:latin typeface="微软雅黑"/>
               </a:rPr>
-              <a:t>6 / 10</a:t>
+              <a:t>6 / 12</a:t>
             </a:r>
           </a:p>
         </p:txBody>
@@ -7528,82 +9655,67 @@
                   <a:srgbClr val="0545E8"/>
                 </a:solidFill>
               </a:rPr>
-              <a:t>① 参考实现真实运行输出（本工单完成态）</a:t>
-            </a:r>
-          </a:p>
-          <a:p>
-            <a:pPr algn="l">
-              <a:spcBef>
-                <a:spcPts val="100"/>
-              </a:spcBef>
-            </a:pPr>
-            <a:r>
-              <a:rPr sz="1000" b="0">
-                <a:solidFill>
-                  <a:srgbClr val="010328"/>
+              <a:t>① 本次真跑实测输出（逐字取自 output/report.txt）</a:t>
+            </a:r>
+          </a:p>
+          <a:p>
+            <a:r>
+              <a:rPr sz="1400" b="1">
+                <a:solidFill>
+                  <a:srgbClr val="0545E8"/>
                 </a:solidFill>
               </a:rPr>
-              <a:t>=== 工单 M2-3b 竞标：CNN焊缝 vs LSTM风机（轻量基线）· 完成态 ===</a:t>
-            </a:r>
-          </a:p>
-          <a:p>
-            <a:pPr algn="l">
-              <a:spcBef>
-                <a:spcPts val="100"/>
-              </a:spcBef>
-            </a:pPr>
-            <a:r>
-              <a:rPr sz="1000" b="0">
-                <a:solidFill>
-                  <a:srgbClr val="010328"/>
+              <a:t>实测达成档位: 优(A) ｜ 代码规范率 95.11%（工单把≥70%钉在 D 档）｜ 复现比对 一致 ｜ CNN(torch) acc 1.0000 ｜ LSTM 误差 0.2593 ｜ 决策矩阵 6 行</a:t>
+            </a:r>
+          </a:p>
+          <a:p>
+            <a:r>
+              <a:rPr sz="1400" b="1">
+                <a:solidFill>
+                  <a:srgbClr val="0545E8"/>
                 </a:solidFill>
               </a:rPr>
-              <a:t>图像线（CNN焊缝·块统计特征3维）: 3折交叉验证 cv = 1.000</a:t>
-            </a:r>
-          </a:p>
-          <a:p>
-            <a:pPr algn="l">
-              <a:spcBef>
-                <a:spcPts val="100"/>
-              </a:spcBef>
-            </a:pPr>
-            <a:r>
-              <a:rPr sz="1000" b="0">
-                <a:solidFill>
-                  <a:srgbClr val="010328"/>
+              <a:t>及格(D)    规范率门槛≥70% [达标] ｜ 功能OK ｜ 指标可复现；代码规范率≥70% ｜ 实测 同种子两次 RF 拟合留出 acc 一致（0.8175 vs 0.8175）；规范率 95.11%</a:t>
+            </a:r>
+          </a:p>
+          <a:p>
+            <a:r>
+              <a:rPr sz="1400" b="1">
+                <a:solidFill>
+                  <a:srgbClr val="0545E8"/>
                 </a:solidFill>
               </a:rPr>
-              <a:t>时序线（LSTM风机·RMS比值1维）  : 3折交叉验证 cv = 0.995</a:t>
-            </a:r>
-          </a:p>
-          <a:p>
-            <a:pPr algn="l">
-              <a:spcBef>
-                <a:spcPts val="100"/>
-              </a:spcBef>
-            </a:pPr>
-            <a:r>
-              <a:rPr sz="1000" b="0">
-                <a:solidFill>
-                  <a:srgbClr val="010328"/>
+              <a:t>良好(C)    规范率不另设线（工单仅 D 档设线，实测 95.11%） [达标] ｜ 功能OK ｜ CNN≥75% 或 LSTM 误差≤25%（仅认真卷积/真 LSTM 臂的实测数字） ｜ 实测 CNN(torch) acc=1.0000（线≥0.75）｜LSTM(torch) 窗口错误率=0.2593（线≤0.25）——兜底臂数字不认（require_real_engine=True）</a:t>
+            </a:r>
+          </a:p>
+          <a:p>
+            <a:r>
+              <a:rPr sz="1400" b="1">
+                <a:solidFill>
+                  <a:srgbClr val="0545E8"/>
                 </a:solidFill>
               </a:rPr>
-              <a:t>竞标建议: 轻量基线支持选「CNN焊缝」（差 0.005）</a:t>
-            </a:r>
-          </a:p>
-          <a:p>
-            <a:pPr algn="l">
-              <a:spcBef>
-                <a:spcPts val="100"/>
-              </a:spcBef>
-            </a:pPr>
-            <a:r>
-              <a:rPr sz="1000" b="0">
-                <a:solidFill>
-                  <a:srgbClr val="010328"/>
+              <a:t>优秀(B)    规范率不另设线（工单仅 D 档设线，实测 95.11%） [达标] ｜ 功能OK ｜ CNN vs LSTM 两轮实测对比齐备；决策记录完整（竞标胜负/评委加分另人工） ｜ 实测 两轮对比：两臂真引擎同口径实测（acc 差 +0.2593、秒差 -0.248s）；决策记录 445 字（线 120）</a:t>
+            </a:r>
+          </a:p>
+          <a:p>
+            <a:r>
+              <a:rPr sz="1400" b="1">
+                <a:solidFill>
+                  <a:srgbClr val="0545E8"/>
                 </a:solidFill>
               </a:rPr>
-              <a:t>答辩要点: 基线≠上限——本表只证明'哪条路线更容易起步'；真模型预期增益需说明数据量、算力与标注成本三项证据。</a:t>
+              <a:t>优(A)     规范率不另设线（工单仅 D 档设线，实测 95.11%） [达标] ｜ 功能OK ｜ 选型决策矩阵：候选×权重×实测得分→结论 ｜ 实测 矩阵 6 行（线≥4）；权重 acc/speed/env=0.5/0.3/0.2 和=1.0；结论成文 136 字（线≥20）</a:t>
+            </a:r>
+          </a:p>
+          <a:p>
+            <a:r>
+              <a:rPr sz="1400" b="1">
+                <a:solidFill>
+                  <a:srgbClr val="0545E8"/>
+                </a:solidFill>
+              </a:rPr>
+              <a:t>人工答辩项（程序不判、不许自称达标）：赢得竞标或评委加分：现场评委裁决，程序无实测依据（工单 B 档人评半，证据包=选型决策矩阵+两轮对比+泄漏核查）；企业元验收栏师傅签认：功能可用/参数留痕/数据可信（学校元</a:t>
             </a:r>
           </a:p>
         </p:txBody>
@@ -7977,7 +10089,7 @@
                 </a:solidFill>
                 <a:latin typeface="微软雅黑"/>
               </a:rPr>
-              <a:t>7 / 10</a:t>
+              <a:t>7 / 12</a:t>
             </a:r>
           </a:p>
         </p:txBody>
@@ -8592,7 +10704,7 @@
                 </a:solidFill>
                 <a:latin typeface="微软雅黑"/>
               </a:rPr>
-              <a:t>8 / 10</a:t>
+              <a:t>10 / 12</a:t>
             </a:r>
           </a:p>
         </p:txBody>
@@ -9297,7 +11409,7 @@
                 </a:solidFill>
                 <a:latin typeface="微软雅黑"/>
               </a:rPr>
-              <a:t>9 / 10</a:t>
+              <a:t>11 / 12</a:t>
             </a:r>
           </a:p>
         </p:txBody>
